--- a/templates/posts/october/01-10-2026-thu-ig-soil-regenerators-boubacar-panorama.pptx
+++ b/templates/posts/october/01-10-2026-thu-ig-soil-regenerators-boubacar-panorama.pptx
@@ -512,7 +512,7 @@
           <a:lstStyle/>
           <a:p>
             <a:r>
-              <a:t>Cover. Grid and continuous hyphae panorama after Stephanie's feedback. Background: assets/collage/boubacar-panorama/ (tools/make_hyphae_panorama.py, drawn by code). His quotes from his email to Allison, 30 Sep 2026. Call to action: his YouTube channel (his Instagram @tidia.diallo.1 is private). Sources: Impact story sheet, Boubacar Tidiane Diallo: https://docs.google.com/spreadsheets/d/10UHLwzJLBQAsmJqmg4hiCQRjBKXPAx7UnOudU-Vsg5U/edit; Email from Boubacar to Allison, 30 September 2026; Instagram: https://www.instagram.com/tidia.diallo.1/; YouTube: https://www.youtube.com/@boubacartidianediallo; Facebook: https://www.facebook.com/btidja; Photos: sent by Boubacar to Stephanie on WhatsApp, 17 August 2026, and to Allison, September 2026. [TAG @Stephanie] Send Boubacar the final caption and slides to approve before posting, and confirm he studied on a scholarship. Photo: boubacar-portrait-bananas-closer.jpg.</a:t>
+              <a:t>Cover. Grid and continuous hyphae panorama after Stephanie's feedback. Background: assets/collage/boubacar-panorama/ (tools/make_hyphae_panorama.py, drawn by code). His quotes from his email to Allison, 30 Sep 2026. Call to action: his YouTube channel (his Instagram @tidia.diallo.1 is private). Sources: Impact story sheet, Boubacar Tidiane Diallo: https://docs.google.com/spreadsheets/d/10UHLwzJLBQAsmJqmg4hiCQRjBKXPAx7UnOudU-Vsg5U/edit; Email from Boubacar to Allison, 30 September 2026; Instagram: https://www.instagram.com/tidia.diallo.1/; YouTube: https://www.youtube.com/@boubacartidianediallo; Facebook: https://www.facebook.com/btidja; Photos: sent by Boubacar to Stephanie on WhatsApp, 17 August 2026, and to Allison, September 2026. [TAG @Stephanie] Send Boubacar the final caption and slides to approve before posting, and confirm he studied on a scholarship. Photo: boubacar-portrait-bananas-closer.jpg. NEW COPY for approval (narrative hook): based on his email and the approved caption draft. Hook paraphrases his line 'Instead of simply feeding plants, I am learning to feed the soil ecosystem that supports the plants.'</a:t>
             </a:r>
           </a:p>
         </p:txBody>
@@ -722,7 +722,7 @@
           <a:lstStyle/>
           <a:p>
             <a:r>
-              <a:t>Gnaly. Grid and continuous hyphae panorama after Stephanie's feedback. Background: assets/collage/boubacar-panorama/ (tools/make_hyphae_panorama.py, drawn by code). His quotes from his email to Allison, 30 Sep 2026. Photos: farm-overview-with-tanks.jpeg, young-tree-with-pineapples.jpg, man-by-water-tanks.jpeg.</a:t>
+              <a:t>Gnaly. Grid and continuous hyphae panorama after Stephanie's feedback. Background: assets/collage/boubacar-panorama/ (tools/make_hyphae_panorama.py, drawn by code). His quotes from his email to Allison, 30 Sep 2026. Photos: farm-overview-with-tanks.jpeg, young-tree-with-pineapples.jpg, man-by-water-tanks.jpeg. NEW COPY for approval (narrative hook): based on his email and the approved caption draft. From the caption: 'When he started, the soil had been degraded and poorly managed for years.'</a:t>
             </a:r>
           </a:p>
         </p:txBody>
@@ -792,7 +792,7 @@
           <a:lstStyle/>
           <a:p>
             <a:r>
-              <a:t>The question. Grid and continuous hyphae panorama after Stephanie's feedback. Background: assets/collage/boubacar-panorama/ (tools/make_hyphae_panorama.py, drawn by code). His quotes from his email to Allison, 30 Sep 2026. Photo: vegetable-beds-by-building.jpeg.</a:t>
+              <a:t>The question. Grid and continuous hyphae panorama after Stephanie's feedback. Background: assets/collage/boubacar-panorama/ (tools/make_hyphae_panorama.py, drawn by code). His quotes from his email to Allison, 30 Sep 2026. Photo: vegetable-beds-by-building.jpeg. NEW COPY for approval (narrative hook): based on his email and the approved caption draft. Lead-in 'So he changed the question' is new; the quote is his.</a:t>
             </a:r>
           </a:p>
         </p:txBody>
@@ -4294,7 +4294,7 @@
       </p:sp>
       <p:pic>
         <p:nvPicPr>
-          <p:cNvPr id="4" name="Picture 3" descr="2915708506369299067.jpg"/>
+          <p:cNvPr id="4" name="Picture 3" descr="6542759857264025041.jpg"/>
           <p:cNvPicPr>
             <a:picLocks noChangeAspect="1"/>
           </p:cNvPicPr>
@@ -4471,8 +4471,8 @@
         </p:nvSpPr>
         <p:spPr>
           <a:xfrm>
-            <a:off x="1047750" y="8652408"/>
-            <a:ext cx="8191500" cy="1774962"/>
+            <a:off x="1047750" y="8681382"/>
+            <a:ext cx="8191500" cy="2024587"/>
           </a:xfrm>
           <a:prstGeom prst="rect">
             <a:avLst/>
@@ -4491,13 +4491,13 @@
               </a:lnSpc>
             </a:pPr>
             <a:r>
-              <a:rPr sz="5200" b="1" i="0">
+              <a:rPr sz="4000" b="1" i="0">
                 <a:solidFill>
                   <a:srgbClr val="1E1412"/>
                 </a:solidFill>
                 <a:latin typeface="Montserrat"/>
               </a:rPr>
-              <a:t>Boubacar Tidiane Diallo</a:t>
+              <a:t>Meet Boubacar. He grows coffee by feeding the soil, not just the plants.</a:t>
             </a:r>
           </a:p>
         </p:txBody>
@@ -4510,8 +4510,8 @@
         </p:nvSpPr>
         <p:spPr>
           <a:xfrm>
-            <a:off x="1047750" y="10427370"/>
-            <a:ext cx="8191500" cy="1017970"/>
+            <a:off x="1047750" y="10705969"/>
+            <a:ext cx="8191500" cy="710397"/>
           </a:xfrm>
           <a:prstGeom prst="rect">
             <a:avLst/>
@@ -4530,13 +4530,13 @@
               </a:lnSpc>
             </a:pPr>
             <a:r>
-              <a:rPr sz="5400" b="0" i="1">
+              <a:rPr sz="3600" b="0" i="0">
                 <a:solidFill>
                   <a:srgbClr val="1E1412"/>
                 </a:solidFill>
-                <a:latin typeface="EB Garamond"/>
+                <a:latin typeface="Source Sans 3"/>
               </a:rPr>
-              <a:t>Guinea-Conakry</a:t>
+              <a:t>Boubacar Tidiane Diallo, Guinea-Conakry</a:t>
             </a:r>
           </a:p>
         </p:txBody>
@@ -4635,7 +4635,7 @@
       </p:sp>
       <p:pic>
         <p:nvPicPr>
-          <p:cNvPr id="4" name="Picture 3" descr="1656793464594487231.jpg"/>
+          <p:cNvPr id="4" name="Picture 3" descr="859469730240263330.jpg"/>
           <p:cNvPicPr>
             <a:picLocks noChangeAspect="1"/>
           </p:cNvPicPr>
@@ -4709,7 +4709,7 @@
       </p:sp>
       <p:pic>
         <p:nvPicPr>
-          <p:cNvPr id="6" name="Picture 5" descr="2670209748706518420.jpg"/>
+          <p:cNvPr id="6" name="Picture 5" descr="6446222981120314919.jpg"/>
           <p:cNvPicPr>
             <a:picLocks noChangeAspect="1"/>
           </p:cNvPicPr>
@@ -4955,7 +4955,7 @@
       </p:sp>
       <p:pic>
         <p:nvPicPr>
-          <p:cNvPr id="4" name="Picture 3" descr="3569230909591733248.jpg"/>
+          <p:cNvPr id="4" name="Picture 3" descr="5882288245012575537.jpg"/>
           <p:cNvPicPr>
             <a:picLocks noChangeAspect="1"/>
           </p:cNvPicPr>
@@ -5264,7 +5264,7 @@
       </p:sp>
       <p:pic>
         <p:nvPicPr>
-          <p:cNvPr id="4" name="Picture 3" descr="4882987764756516542.jpg"/>
+          <p:cNvPr id="4" name="Picture 3" descr="888004338175241060.jpg"/>
           <p:cNvPicPr>
             <a:picLocks noChangeAspect="1"/>
           </p:cNvPicPr>
@@ -5338,7 +5338,7 @@
       </p:sp>
       <p:pic>
         <p:nvPicPr>
-          <p:cNvPr id="6" name="Picture 5" descr="5058600998190013377.jpg"/>
+          <p:cNvPr id="6" name="Picture 5" descr="2589091239255409415.jpg"/>
           <p:cNvPicPr>
             <a:picLocks noChangeAspect="1"/>
           </p:cNvPicPr>
@@ -5412,7 +5412,7 @@
       </p:sp>
       <p:pic>
         <p:nvPicPr>
-          <p:cNvPr id="8" name="Picture 7" descr="4463507082439028715.jpg"/>
+          <p:cNvPr id="8" name="Picture 7" descr="7450643337973146649.jpg"/>
           <p:cNvPicPr>
             <a:picLocks noChangeAspect="1"/>
           </p:cNvPicPr>
@@ -5494,8 +5494,8 @@
         </p:nvSpPr>
         <p:spPr>
           <a:xfrm>
-            <a:off x="1047750" y="8783164"/>
-            <a:ext cx="8191500" cy="1650149"/>
+            <a:off x="1047750" y="8625662"/>
+            <a:ext cx="8191500" cy="1213306"/>
           </a:xfrm>
           <a:prstGeom prst="rect">
             <a:avLst/>
@@ -5514,13 +5514,13 @@
               </a:lnSpc>
             </a:pPr>
             <a:r>
-              <a:rPr sz="4800" b="1" i="0">
+              <a:rPr sz="3400" b="1" i="0">
                 <a:solidFill>
                   <a:srgbClr val="22371F"/>
                 </a:solidFill>
                 <a:latin typeface="Montserrat"/>
               </a:rPr>
-              <a:t>Gnaly Coffee &amp; AgroÉcole Bio</a:t>
+              <a:t>When he started, the land was worn out.</a:t>
             </a:r>
           </a:p>
         </p:txBody>
@@ -5533,8 +5533,8 @@
         </p:nvSpPr>
         <p:spPr>
           <a:xfrm>
-            <a:off x="1047750" y="10433314"/>
-            <a:ext cx="8191500" cy="881271"/>
+            <a:off x="1047750" y="9838969"/>
+            <a:ext cx="8191500" cy="1633118"/>
           </a:xfrm>
           <a:prstGeom prst="rect">
             <a:avLst/>
@@ -5553,13 +5553,13 @@
               </a:lnSpc>
             </a:pPr>
             <a:r>
-              <a:rPr sz="4600" b="0" i="0">
+              <a:rPr sz="3000" b="0" i="0">
                 <a:solidFill>
                   <a:srgbClr val="22371F"/>
                 </a:solidFill>
                 <a:latin typeface="Source Sans 3"/>
               </a:rPr>
-              <a:t>Fouta Djallon, Guinea-Conakry</a:t>
+              <a:t>The soil at Gnaly Coffee &amp; AgroÉcole Bio, in the Fouta Djallon highlands of Guinea-Conakry, had been degraded and poorly managed for years.</a:t>
             </a:r>
           </a:p>
         </p:txBody>
@@ -5697,7 +5697,7 @@
       </p:sp>
       <p:pic>
         <p:nvPicPr>
-          <p:cNvPr id="4" name="Picture 3" descr="2432787470622474919.jpg"/>
+          <p:cNvPr id="4" name="Picture 3" descr="1053021958879629067.jpg"/>
           <p:cNvPicPr>
             <a:picLocks noChangeAspect="1"/>
           </p:cNvPicPr>
@@ -5818,8 +5818,47 @@
         </p:nvSpPr>
         <p:spPr>
           <a:xfrm>
-            <a:off x="1047750" y="8719693"/>
-            <a:ext cx="8191500" cy="2658363"/>
+            <a:off x="1047750" y="8948095"/>
+            <a:ext cx="8191500" cy="807665"/>
+          </a:xfrm>
+          <a:prstGeom prst="rect">
+            <a:avLst/>
+          </a:prstGeom>
+          <a:noFill/>
+        </p:spPr>
+        <p:txBody>
+          <a:bodyPr wrap="square" lIns="0" rIns="0" tIns="0" bIns="0" anchor="t">
+            <a:spAutoFit/>
+          </a:bodyPr>
+          <a:lstStyle/>
+          <a:p>
+            <a:pPr algn="l">
+              <a:lnSpc>
+                <a:spcPct val="105000"/>
+              </a:lnSpc>
+            </a:pPr>
+            <a:r>
+              <a:rPr sz="4200" b="1" i="0">
+                <a:solidFill>
+                  <a:srgbClr val="3A2524"/>
+                </a:solidFill>
+                <a:latin typeface="Montserrat"/>
+              </a:rPr>
+              <a:t>So he changed the question:</a:t>
+            </a:r>
+          </a:p>
+        </p:txBody>
+      </p:sp>
+      <p:sp>
+        <p:nvSpPr>
+          <p:cNvPr id="8" name="TextBox 7"/>
+          <p:cNvSpPr txBox="1"/>
+          <p:nvPr/>
+        </p:nvSpPr>
+        <p:spPr>
+          <a:xfrm>
+            <a:off x="1047750" y="9755760"/>
+            <a:ext cx="8191500" cy="1393894"/>
           </a:xfrm>
           <a:prstGeom prst="rect">
             <a:avLst/>
@@ -5838,7 +5877,7 @@
               </a:lnSpc>
             </a:pPr>
             <a:r>
-              <a:rPr sz="5000" b="0" i="1">
+              <a:rPr sz="3800" b="0" i="1">
                 <a:solidFill>
                   <a:srgbClr val="3A2524"/>
                 </a:solidFill>
@@ -5851,7 +5890,7 @@
       </p:sp>
       <p:sp>
         <p:nvSpPr>
-          <p:cNvPr id="8" name="TextBox 7"/>
+          <p:cNvPr id="9" name="TextBox 8"/>
           <p:cNvSpPr txBox="1"/>
           <p:nvPr/>
         </p:nvSpPr>
@@ -5982,7 +6021,7 @@
       </p:sp>
       <p:pic>
         <p:nvPicPr>
-          <p:cNvPr id="4" name="Picture 3" descr="2520087226536762781.jpg"/>
+          <p:cNvPr id="4" name="Picture 3" descr="3405020167820716295.jpg"/>
           <p:cNvPicPr>
             <a:picLocks noChangeAspect="1"/>
           </p:cNvPicPr>
@@ -6056,7 +6095,7 @@
       </p:sp>
       <p:pic>
         <p:nvPicPr>
-          <p:cNvPr id="6" name="Picture 5" descr="7727649350495454104.jpg"/>
+          <p:cNvPr id="6" name="Picture 5" descr="692908753897821274.jpg"/>
           <p:cNvPicPr>
             <a:picLocks noChangeAspect="1"/>
           </p:cNvPicPr>
@@ -6341,7 +6380,7 @@
       </p:sp>
       <p:pic>
         <p:nvPicPr>
-          <p:cNvPr id="4" name="Picture 3" descr="7360968692488919039.jpg"/>
+          <p:cNvPr id="4" name="Picture 3" descr="3489943308185391326.jpg"/>
           <p:cNvPicPr>
             <a:picLocks noChangeAspect="1"/>
           </p:cNvPicPr>
@@ -6415,7 +6454,7 @@
       </p:sp>
       <p:pic>
         <p:nvPicPr>
-          <p:cNvPr id="6" name="Picture 5" descr="8716839783421296724.jpg"/>
+          <p:cNvPr id="6" name="Picture 5" descr="8015735983394514869.jpg"/>
           <p:cNvPicPr>
             <a:picLocks noChangeAspect="1"/>
           </p:cNvPicPr>
@@ -6489,7 +6528,7 @@
       </p:sp>
       <p:pic>
         <p:nvPicPr>
-          <p:cNvPr id="8" name="Picture 7" descr="3409816208287969392.jpg"/>
+          <p:cNvPr id="8" name="Picture 7" descr="290664270133015781.jpg"/>
           <p:cNvPicPr>
             <a:picLocks noChangeAspect="1"/>
           </p:cNvPicPr>
@@ -6735,7 +6774,7 @@
       </p:sp>
       <p:pic>
         <p:nvPicPr>
-          <p:cNvPr id="4" name="Picture 3" descr="5476898924618735149.jpg"/>
+          <p:cNvPr id="4" name="Picture 3" descr="1388158669510424059.jpg"/>
           <p:cNvPicPr>
             <a:picLocks noChangeAspect="1"/>
           </p:cNvPicPr>
@@ -6809,7 +6848,7 @@
       </p:sp>
       <p:pic>
         <p:nvPicPr>
-          <p:cNvPr id="6" name="Picture 5" descr="7536453492721166001.jpg"/>
+          <p:cNvPr id="6" name="Picture 5" descr="1833522976654264346.jpg"/>
           <p:cNvPicPr>
             <a:picLocks noChangeAspect="1"/>
           </p:cNvPicPr>
@@ -7094,7 +7133,7 @@
       </p:sp>
       <p:pic>
         <p:nvPicPr>
-          <p:cNvPr id="4" name="Picture 3" descr="6419506637691987574.jpg"/>
+          <p:cNvPr id="4" name="Picture 3" descr="789572690591433854.jpg"/>
           <p:cNvPicPr>
             <a:picLocks noChangeAspect="1"/>
           </p:cNvPicPr>
@@ -7168,7 +7207,7 @@
       </p:sp>
       <p:pic>
         <p:nvPicPr>
-          <p:cNvPr id="6" name="Picture 5" descr="6794266426832732997.jpg"/>
+          <p:cNvPr id="6" name="Picture 5" descr="3937504228287124507.jpg"/>
           <p:cNvPicPr>
             <a:picLocks noChangeAspect="1"/>
           </p:cNvPicPr>
@@ -7242,7 +7281,7 @@
       </p:sp>
       <p:pic>
         <p:nvPicPr>
-          <p:cNvPr id="8" name="Picture 7" descr="2208559977968711287.jpg"/>
+          <p:cNvPr id="8" name="Picture 7" descr="2074871535571420541.jpg"/>
           <p:cNvPicPr>
             <a:picLocks noChangeAspect="1"/>
           </p:cNvPicPr>
@@ -7488,7 +7527,7 @@
       </p:sp>
       <p:pic>
         <p:nvPicPr>
-          <p:cNvPr id="4" name="Picture 3" descr="2674830737729816644.jpg"/>
+          <p:cNvPr id="4" name="Picture 3" descr="637867189905250528.jpg"/>
           <p:cNvPicPr>
             <a:picLocks noChangeAspect="1"/>
           </p:cNvPicPr>
@@ -7562,7 +7601,7 @@
       </p:sp>
       <p:pic>
         <p:nvPicPr>
-          <p:cNvPr id="6" name="Picture 5" descr="5132770453172844333.jpg"/>
+          <p:cNvPr id="6" name="Picture 5" descr="960496982117691770.jpg"/>
           <p:cNvPicPr>
             <a:picLocks noChangeAspect="1"/>
           </p:cNvPicPr>
@@ -7847,7 +7886,7 @@
       </p:sp>
       <p:pic>
         <p:nvPicPr>
-          <p:cNvPr id="4" name="Picture 3" descr="6370427101001267727.jpg"/>
+          <p:cNvPr id="4" name="Picture 3" descr="1472895862002148508.jpg"/>
           <p:cNvPicPr>
             <a:picLocks noChangeAspect="1"/>
           </p:cNvPicPr>
@@ -7921,7 +7960,7 @@
       </p:sp>
       <p:pic>
         <p:nvPicPr>
-          <p:cNvPr id="6" name="Picture 5" descr="8487187208040710867.jpg"/>
+          <p:cNvPr id="6" name="Picture 5" descr="2691755101342095090.jpg"/>
           <p:cNvPicPr>
             <a:picLocks noChangeAspect="1"/>
           </p:cNvPicPr>
@@ -7995,7 +8034,7 @@
       </p:sp>
       <p:pic>
         <p:nvPicPr>
-          <p:cNvPr id="8" name="Picture 7" descr="4732268557193302030.jpg"/>
+          <p:cNvPr id="8" name="Picture 7" descr="8962696689160125669.jpg"/>
           <p:cNvPicPr>
             <a:picLocks noChangeAspect="1"/>
           </p:cNvPicPr>

--- a/templates/posts/october/01-10-2026-thu-ig-soil-regenerators-boubacar-panorama.pptx
+++ b/templates/posts/october/01-10-2026-thu-ig-soil-regenerators-boubacar-panorama.pptx
@@ -512,7 +512,7 @@
           <a:lstStyle/>
           <a:p>
             <a:r>
-              <a:t>Cover. Grid and continuous hyphae panorama after Stephanie's feedback. Background: assets/collage/boubacar-panorama/ (tools/make_hyphae_panorama.py, drawn by code). His quotes from his email to Allison, 30 Sep 2026. Call to action: his YouTube channel (his Instagram @tidia.diallo.1 is private). Sources: Impact story sheet, Boubacar Tidiane Diallo: https://docs.google.com/spreadsheets/d/10UHLwzJLBQAsmJqmg4hiCQRjBKXPAx7UnOudU-Vsg5U/edit; Email from Boubacar to Allison, 30 September 2026; Instagram: https://www.instagram.com/tidia.diallo.1/; YouTube: https://www.youtube.com/@boubacartidianediallo; Facebook: https://www.facebook.com/btidja; Photos: sent by Boubacar to Stephanie on WhatsApp, 17 August 2026, and to Allison, September 2026. [TAG @Stephanie] Send Boubacar the final caption and slides to approve before posting, and confirm he studied on a scholarship. Photo: boubacar-portrait-bananas-closer.jpg. NEW COPY for approval (narrative hook): based on his email and the approved caption draft. Hook paraphrases his line 'Instead of simply feeding plants, I am learning to feed the soil ecosystem that supports the plants.'</a:t>
+              <a:t>Cover. Grid and continuous hyphae panorama after Stephanie's feedback. Background: assets/collage/boubacar-panorama/ (tools/make_hyphae_panorama.py, drawn by code). His quotes from his email to Allison, 30 Sep 2026. Call to action: his YouTube channel (his Instagram @tidia.diallo.1 is private). Sources: Impact story sheet, Boubacar Tidiane Diallo: https://docs.google.com/spreadsheets/d/10UHLwzJLBQAsmJqmg4hiCQRjBKXPAx7UnOudU-Vsg5U/edit; Email from Boubacar to Allison, 30 September 2026; Instagram: https://www.instagram.com/tidia.diallo.1/; YouTube: https://www.youtube.com/@boubacartidianediallo; Facebook: https://www.facebook.com/btidja; Photos: sent by Boubacar to Stephanie on WhatsApp, 17 August 2026, and to Allison, September 2026. [TAG @Stephanie] Send Boubacar the final caption and slides to approve before posting, and confirm he studied on a scholarship. Photo: boubacar-portrait-bananas-closer.jpg. Graduation line from Linnea (1 Oct 2026): confirm the exact course or program and the date [VERIFY].</a:t>
             </a:r>
           </a:p>
         </p:txBody>
@@ -4294,7 +4294,7 @@
       </p:sp>
       <p:pic>
         <p:nvPicPr>
-          <p:cNvPr id="4" name="Picture 3" descr="6542759857264025041.jpg"/>
+          <p:cNvPr id="4" name="Picture 3" descr="7134253713308919662.jpg"/>
           <p:cNvPicPr>
             <a:picLocks noChangeAspect="1"/>
           </p:cNvPicPr>
@@ -4471,8 +4471,8 @@
         </p:nvSpPr>
         <p:spPr>
           <a:xfrm>
-            <a:off x="1047750" y="8681382"/>
-            <a:ext cx="8191500" cy="2024587"/>
+            <a:off x="1047750" y="8623434"/>
+            <a:ext cx="8191500" cy="807665"/>
           </a:xfrm>
           <a:prstGeom prst="rect">
             <a:avLst/>
@@ -4491,13 +4491,13 @@
               </a:lnSpc>
             </a:pPr>
             <a:r>
-              <a:rPr sz="4000" b="1" i="0">
+              <a:rPr sz="4200" b="1" i="0">
                 <a:solidFill>
                   <a:srgbClr val="1E1412"/>
                 </a:solidFill>
                 <a:latin typeface="Montserrat"/>
               </a:rPr>
-              <a:t>Meet Boubacar. He grows coffee by feeding the soil, not just the plants.</a:t>
+              <a:t>Boubacar Tidiane Diallo</a:t>
             </a:r>
           </a:p>
         </p:txBody>
@@ -4510,8 +4510,8 @@
         </p:nvSpPr>
         <p:spPr>
           <a:xfrm>
-            <a:off x="1047750" y="10705969"/>
-            <a:ext cx="8191500" cy="710397"/>
+            <a:off x="1047750" y="9431099"/>
+            <a:ext cx="8191500" cy="2043216"/>
           </a:xfrm>
           <a:prstGeom prst="rect">
             <a:avLst/>
@@ -4530,13 +4530,29 @@
               </a:lnSpc>
             </a:pPr>
             <a:r>
-              <a:rPr sz="3600" b="0" i="0">
+              <a:rPr sz="3800" b="0" i="0">
                 <a:solidFill>
                   <a:srgbClr val="1E1412"/>
                 </a:solidFill>
                 <a:latin typeface="Source Sans 3"/>
               </a:rPr>
-              <a:t>Boubacar Tidiane Diallo, Guinea-Conakry</a:t>
+              <a:t>Guinea-Conakry</a:t>
+            </a:r>
+          </a:p>
+          <a:p>
+            <a:pPr algn="l">
+              <a:lnSpc>
+                <a:spcPct val="115000"/>
+              </a:lnSpc>
+            </a:pPr>
+            <a:r>
+              <a:rPr sz="3800" b="0" i="0">
+                <a:solidFill>
+                  <a:srgbClr val="1E1412"/>
+                </a:solidFill>
+                <a:latin typeface="Source Sans 3"/>
+              </a:rPr>
+              <a:t>Graduated from the Soil Food Web School in July 2026</a:t>
             </a:r>
           </a:p>
         </p:txBody>
@@ -4635,7 +4651,7 @@
       </p:sp>
       <p:pic>
         <p:nvPicPr>
-          <p:cNvPr id="4" name="Picture 3" descr="859469730240263330.jpg"/>
+          <p:cNvPr id="4" name="Picture 3" descr="5624748979687717632.jpg"/>
           <p:cNvPicPr>
             <a:picLocks noChangeAspect="1"/>
           </p:cNvPicPr>
@@ -4709,7 +4725,7 @@
       </p:sp>
       <p:pic>
         <p:nvPicPr>
-          <p:cNvPr id="6" name="Picture 5" descr="6446222981120314919.jpg"/>
+          <p:cNvPr id="6" name="Picture 5" descr="5312846024647597565.jpg"/>
           <p:cNvPicPr>
             <a:picLocks noChangeAspect="1"/>
           </p:cNvPicPr>
@@ -4955,7 +4971,7 @@
       </p:sp>
       <p:pic>
         <p:nvPicPr>
-          <p:cNvPr id="4" name="Picture 3" descr="5882288245012575537.jpg"/>
+          <p:cNvPr id="4" name="Picture 3" descr="1198194770462467164.jpg"/>
           <p:cNvPicPr>
             <a:picLocks noChangeAspect="1"/>
           </p:cNvPicPr>
@@ -5264,7 +5280,7 @@
       </p:sp>
       <p:pic>
         <p:nvPicPr>
-          <p:cNvPr id="4" name="Picture 3" descr="888004338175241060.jpg"/>
+          <p:cNvPr id="4" name="Picture 3" descr="6418962251702900842.jpg"/>
           <p:cNvPicPr>
             <a:picLocks noChangeAspect="1"/>
           </p:cNvPicPr>
@@ -5338,7 +5354,7 @@
       </p:sp>
       <p:pic>
         <p:nvPicPr>
-          <p:cNvPr id="6" name="Picture 5" descr="2589091239255409415.jpg"/>
+          <p:cNvPr id="6" name="Picture 5" descr="6699318444570406175.jpg"/>
           <p:cNvPicPr>
             <a:picLocks noChangeAspect="1"/>
           </p:cNvPicPr>
@@ -5412,7 +5428,7 @@
       </p:sp>
       <p:pic>
         <p:nvPicPr>
-          <p:cNvPr id="8" name="Picture 7" descr="7450643337973146649.jpg"/>
+          <p:cNvPr id="8" name="Picture 7" descr="8653640377674119268.jpg"/>
           <p:cNvPicPr>
             <a:picLocks noChangeAspect="1"/>
           </p:cNvPicPr>
@@ -5697,7 +5713,7 @@
       </p:sp>
       <p:pic>
         <p:nvPicPr>
-          <p:cNvPr id="4" name="Picture 3" descr="1053021958879629067.jpg"/>
+          <p:cNvPr id="4" name="Picture 3" descr="5288047924582150184.jpg"/>
           <p:cNvPicPr>
             <a:picLocks noChangeAspect="1"/>
           </p:cNvPicPr>
@@ -6021,7 +6037,7 @@
       </p:sp>
       <p:pic>
         <p:nvPicPr>
-          <p:cNvPr id="4" name="Picture 3" descr="3405020167820716295.jpg"/>
+          <p:cNvPr id="4" name="Picture 3" descr="8041883124578728280.jpg"/>
           <p:cNvPicPr>
             <a:picLocks noChangeAspect="1"/>
           </p:cNvPicPr>
@@ -6095,7 +6111,7 @@
       </p:sp>
       <p:pic>
         <p:nvPicPr>
-          <p:cNvPr id="6" name="Picture 5" descr="692908753897821274.jpg"/>
+          <p:cNvPr id="6" name="Picture 5" descr="5109255838637421891.jpg"/>
           <p:cNvPicPr>
             <a:picLocks noChangeAspect="1"/>
           </p:cNvPicPr>
@@ -6380,7 +6396,7 @@
       </p:sp>
       <p:pic>
         <p:nvPicPr>
-          <p:cNvPr id="4" name="Picture 3" descr="3489943308185391326.jpg"/>
+          <p:cNvPr id="4" name="Picture 3" descr="7845958211265690100.jpg"/>
           <p:cNvPicPr>
             <a:picLocks noChangeAspect="1"/>
           </p:cNvPicPr>
@@ -6454,7 +6470,7 @@
       </p:sp>
       <p:pic>
         <p:nvPicPr>
-          <p:cNvPr id="6" name="Picture 5" descr="8015735983394514869.jpg"/>
+          <p:cNvPr id="6" name="Picture 5" descr="6768793353179528146.jpg"/>
           <p:cNvPicPr>
             <a:picLocks noChangeAspect="1"/>
           </p:cNvPicPr>
@@ -6528,7 +6544,7 @@
       </p:sp>
       <p:pic>
         <p:nvPicPr>
-          <p:cNvPr id="8" name="Picture 7" descr="290664270133015781.jpg"/>
+          <p:cNvPr id="8" name="Picture 7" descr="502298545864334185.jpg"/>
           <p:cNvPicPr>
             <a:picLocks noChangeAspect="1"/>
           </p:cNvPicPr>
@@ -6774,7 +6790,7 @@
       </p:sp>
       <p:pic>
         <p:nvPicPr>
-          <p:cNvPr id="4" name="Picture 3" descr="1388158669510424059.jpg"/>
+          <p:cNvPr id="4" name="Picture 3" descr="5578419962022039927.jpg"/>
           <p:cNvPicPr>
             <a:picLocks noChangeAspect="1"/>
           </p:cNvPicPr>
@@ -6848,7 +6864,7 @@
       </p:sp>
       <p:pic>
         <p:nvPicPr>
-          <p:cNvPr id="6" name="Picture 5" descr="1833522976654264346.jpg"/>
+          <p:cNvPr id="6" name="Picture 5" descr="885020190814030041.jpg"/>
           <p:cNvPicPr>
             <a:picLocks noChangeAspect="1"/>
           </p:cNvPicPr>
@@ -7133,7 +7149,7 @@
       </p:sp>
       <p:pic>
         <p:nvPicPr>
-          <p:cNvPr id="4" name="Picture 3" descr="789572690591433854.jpg"/>
+          <p:cNvPr id="4" name="Picture 3" descr="2653324706775147677.jpg"/>
           <p:cNvPicPr>
             <a:picLocks noChangeAspect="1"/>
           </p:cNvPicPr>
@@ -7207,7 +7223,7 @@
       </p:sp>
       <p:pic>
         <p:nvPicPr>
-          <p:cNvPr id="6" name="Picture 5" descr="3937504228287124507.jpg"/>
+          <p:cNvPr id="6" name="Picture 5" descr="2791720370428551117.jpg"/>
           <p:cNvPicPr>
             <a:picLocks noChangeAspect="1"/>
           </p:cNvPicPr>
@@ -7281,7 +7297,7 @@
       </p:sp>
       <p:pic>
         <p:nvPicPr>
-          <p:cNvPr id="8" name="Picture 7" descr="2074871535571420541.jpg"/>
+          <p:cNvPr id="8" name="Picture 7" descr="8985887862467248455.jpg"/>
           <p:cNvPicPr>
             <a:picLocks noChangeAspect="1"/>
           </p:cNvPicPr>
@@ -7527,7 +7543,7 @@
       </p:sp>
       <p:pic>
         <p:nvPicPr>
-          <p:cNvPr id="4" name="Picture 3" descr="637867189905250528.jpg"/>
+          <p:cNvPr id="4" name="Picture 3" descr="2576760445911522804.jpg"/>
           <p:cNvPicPr>
             <a:picLocks noChangeAspect="1"/>
           </p:cNvPicPr>
@@ -7601,7 +7617,7 @@
       </p:sp>
       <p:pic>
         <p:nvPicPr>
-          <p:cNvPr id="6" name="Picture 5" descr="960496982117691770.jpg"/>
+          <p:cNvPr id="6" name="Picture 5" descr="5796296351949293045.jpg"/>
           <p:cNvPicPr>
             <a:picLocks noChangeAspect="1"/>
           </p:cNvPicPr>
@@ -7886,7 +7902,7 @@
       </p:sp>
       <p:pic>
         <p:nvPicPr>
-          <p:cNvPr id="4" name="Picture 3" descr="1472895862002148508.jpg"/>
+          <p:cNvPr id="4" name="Picture 3" descr="7569565634467311940.jpg"/>
           <p:cNvPicPr>
             <a:picLocks noChangeAspect="1"/>
           </p:cNvPicPr>
@@ -7960,7 +7976,7 @@
       </p:sp>
       <p:pic>
         <p:nvPicPr>
-          <p:cNvPr id="6" name="Picture 5" descr="2691755101342095090.jpg"/>
+          <p:cNvPr id="6" name="Picture 5" descr="2243472078506660866.jpg"/>
           <p:cNvPicPr>
             <a:picLocks noChangeAspect="1"/>
           </p:cNvPicPr>
@@ -8034,7 +8050,7 @@
       </p:sp>
       <p:pic>
         <p:nvPicPr>
-          <p:cNvPr id="8" name="Picture 7" descr="8962696689160125669.jpg"/>
+          <p:cNvPr id="8" name="Picture 7" descr="4989919598133606109.jpg"/>
           <p:cNvPicPr>
             <a:picLocks noChangeAspect="1"/>
           </p:cNvPicPr>

--- a/templates/posts/october/01-10-2026-thu-ig-soil-regenerators-boubacar-panorama.pptx
+++ b/templates/posts/october/01-10-2026-thu-ig-soil-regenerators-boubacar-panorama.pptx
@@ -4294,7 +4294,7 @@
       </p:sp>
       <p:pic>
         <p:nvPicPr>
-          <p:cNvPr id="4" name="Picture 3" descr="7134253713308919662.jpg"/>
+          <p:cNvPr id="4" name="Picture 3" descr="4109970979879242798.jpg"/>
           <p:cNvPicPr>
             <a:picLocks noChangeAspect="1"/>
           </p:cNvPicPr>
@@ -4651,7 +4651,7 @@
       </p:sp>
       <p:pic>
         <p:nvPicPr>
-          <p:cNvPr id="4" name="Picture 3" descr="5624748979687717632.jpg"/>
+          <p:cNvPr id="4" name="Picture 3" descr="5001811493132577753.jpg"/>
           <p:cNvPicPr>
             <a:picLocks noChangeAspect="1"/>
           </p:cNvPicPr>
@@ -4725,7 +4725,7 @@
       </p:sp>
       <p:pic>
         <p:nvPicPr>
-          <p:cNvPr id="6" name="Picture 5" descr="5312846024647597565.jpg"/>
+          <p:cNvPr id="6" name="Picture 5" descr="3981282921135775951.jpg"/>
           <p:cNvPicPr>
             <a:picLocks noChangeAspect="1"/>
           </p:cNvPicPr>
@@ -4971,7 +4971,7 @@
       </p:sp>
       <p:pic>
         <p:nvPicPr>
-          <p:cNvPr id="4" name="Picture 3" descr="1198194770462467164.jpg"/>
+          <p:cNvPr id="4" name="Picture 3" descr="1765150814990569495.jpg"/>
           <p:cNvPicPr>
             <a:picLocks noChangeAspect="1"/>
           </p:cNvPicPr>
@@ -5280,7 +5280,7 @@
       </p:sp>
       <p:pic>
         <p:nvPicPr>
-          <p:cNvPr id="4" name="Picture 3" descr="6418962251702900842.jpg"/>
+          <p:cNvPr id="4" name="Picture 3" descr="8142344001491773862.jpg"/>
           <p:cNvPicPr>
             <a:picLocks noChangeAspect="1"/>
           </p:cNvPicPr>
@@ -5354,7 +5354,7 @@
       </p:sp>
       <p:pic>
         <p:nvPicPr>
-          <p:cNvPr id="6" name="Picture 5" descr="6699318444570406175.jpg"/>
+          <p:cNvPr id="6" name="Picture 5" descr="4095069121903239095.jpg"/>
           <p:cNvPicPr>
             <a:picLocks noChangeAspect="1"/>
           </p:cNvPicPr>
@@ -5428,7 +5428,7 @@
       </p:sp>
       <p:pic>
         <p:nvPicPr>
-          <p:cNvPr id="8" name="Picture 7" descr="8653640377674119268.jpg"/>
+          <p:cNvPr id="8" name="Picture 7" descr="5209725869530073473.jpg"/>
           <p:cNvPicPr>
             <a:picLocks noChangeAspect="1"/>
           </p:cNvPicPr>
@@ -5713,7 +5713,7 @@
       </p:sp>
       <p:pic>
         <p:nvPicPr>
-          <p:cNvPr id="4" name="Picture 3" descr="5288047924582150184.jpg"/>
+          <p:cNvPr id="4" name="Picture 3" descr="6262579434734107698.jpg"/>
           <p:cNvPicPr>
             <a:picLocks noChangeAspect="1"/>
           </p:cNvPicPr>
@@ -5774,9 +5774,33 @@
           </a:p>
         </p:txBody>
       </p:sp>
-      <p:sp>
-        <p:nvSpPr>
-          <p:cNvPr id="6" name="Rectangle 5"/>
+      <p:pic>
+        <p:nvPicPr>
+          <p:cNvPr id="6" name="Picture 5" descr="foundation-logo-white.png"/>
+          <p:cNvPicPr>
+            <a:picLocks noChangeAspect="1"/>
+          </p:cNvPicPr>
+          <p:nvPr/>
+        </p:nvPicPr>
+        <p:blipFill>
+          <a:blip r:embed="rId5"/>
+          <a:stretch>
+            <a:fillRect/>
+          </a:stretch>
+        </p:blipFill>
+        <p:spPr>
+          <a:xfrm>
+            <a:off x="7048500" y="4857750"/>
+            <a:ext cx="2286000" cy="2055246"/>
+          </a:xfrm>
+          <a:prstGeom prst="rect">
+            <a:avLst/>
+          </a:prstGeom>
+        </p:spPr>
+      </p:pic>
+      <p:sp>
+        <p:nvSpPr>
+          <p:cNvPr id="7" name="Rectangle 6"/>
           <p:cNvSpPr/>
           <p:nvPr/>
         </p:nvSpPr>
@@ -5828,7 +5852,7 @@
       </p:sp>
       <p:sp>
         <p:nvSpPr>
-          <p:cNvPr id="7" name="TextBox 6"/>
+          <p:cNvPr id="8" name="TextBox 7"/>
           <p:cNvSpPr txBox="1"/>
           <p:nvPr/>
         </p:nvSpPr>
@@ -5867,7 +5891,7 @@
       </p:sp>
       <p:sp>
         <p:nvSpPr>
-          <p:cNvPr id="8" name="TextBox 7"/>
+          <p:cNvPr id="9" name="TextBox 8"/>
           <p:cNvSpPr txBox="1"/>
           <p:nvPr/>
         </p:nvSpPr>
@@ -5906,7 +5930,7 @@
       </p:sp>
       <p:sp>
         <p:nvSpPr>
-          <p:cNvPr id="9" name="TextBox 8"/>
+          <p:cNvPr id="10" name="TextBox 9"/>
           <p:cNvSpPr txBox="1"/>
           <p:nvPr/>
         </p:nvSpPr>
@@ -6037,7 +6061,7 @@
       </p:sp>
       <p:pic>
         <p:nvPicPr>
-          <p:cNvPr id="4" name="Picture 3" descr="8041883124578728280.jpg"/>
+          <p:cNvPr id="4" name="Picture 3" descr="989601373573727200.jpg"/>
           <p:cNvPicPr>
             <a:picLocks noChangeAspect="1"/>
           </p:cNvPicPr>
@@ -6111,7 +6135,7 @@
       </p:sp>
       <p:pic>
         <p:nvPicPr>
-          <p:cNvPr id="6" name="Picture 5" descr="5109255838637421891.jpg"/>
+          <p:cNvPr id="6" name="Picture 5" descr="3828878438671017906.jpg"/>
           <p:cNvPicPr>
             <a:picLocks noChangeAspect="1"/>
           </p:cNvPicPr>
@@ -6396,7 +6420,7 @@
       </p:sp>
       <p:pic>
         <p:nvPicPr>
-          <p:cNvPr id="4" name="Picture 3" descr="7845958211265690100.jpg"/>
+          <p:cNvPr id="4" name="Picture 3" descr="2954773160852668268.jpg"/>
           <p:cNvPicPr>
             <a:picLocks noChangeAspect="1"/>
           </p:cNvPicPr>
@@ -6470,7 +6494,7 @@
       </p:sp>
       <p:pic>
         <p:nvPicPr>
-          <p:cNvPr id="6" name="Picture 5" descr="6768793353179528146.jpg"/>
+          <p:cNvPr id="6" name="Picture 5" descr="7785404507869214963.jpg"/>
           <p:cNvPicPr>
             <a:picLocks noChangeAspect="1"/>
           </p:cNvPicPr>
@@ -6544,7 +6568,7 @@
       </p:sp>
       <p:pic>
         <p:nvPicPr>
-          <p:cNvPr id="8" name="Picture 7" descr="502298545864334185.jpg"/>
+          <p:cNvPr id="8" name="Picture 7" descr="5337330571368428975.jpg"/>
           <p:cNvPicPr>
             <a:picLocks noChangeAspect="1"/>
           </p:cNvPicPr>
@@ -6790,7 +6814,7 @@
       </p:sp>
       <p:pic>
         <p:nvPicPr>
-          <p:cNvPr id="4" name="Picture 3" descr="5578419962022039927.jpg"/>
+          <p:cNvPr id="4" name="Picture 3" descr="8572501075660517052.jpg"/>
           <p:cNvPicPr>
             <a:picLocks noChangeAspect="1"/>
           </p:cNvPicPr>
@@ -6864,7 +6888,7 @@
       </p:sp>
       <p:pic>
         <p:nvPicPr>
-          <p:cNvPr id="6" name="Picture 5" descr="885020190814030041.jpg"/>
+          <p:cNvPr id="6" name="Picture 5" descr="6801969508129382990.jpg"/>
           <p:cNvPicPr>
             <a:picLocks noChangeAspect="1"/>
           </p:cNvPicPr>
@@ -7149,7 +7173,7 @@
       </p:sp>
       <p:pic>
         <p:nvPicPr>
-          <p:cNvPr id="4" name="Picture 3" descr="2653324706775147677.jpg"/>
+          <p:cNvPr id="4" name="Picture 3" descr="2048157300180630448.jpg"/>
           <p:cNvPicPr>
             <a:picLocks noChangeAspect="1"/>
           </p:cNvPicPr>
@@ -7223,7 +7247,7 @@
       </p:sp>
       <p:pic>
         <p:nvPicPr>
-          <p:cNvPr id="6" name="Picture 5" descr="2791720370428551117.jpg"/>
+          <p:cNvPr id="6" name="Picture 5" descr="1446839296383176992.jpg"/>
           <p:cNvPicPr>
             <a:picLocks noChangeAspect="1"/>
           </p:cNvPicPr>
@@ -7297,7 +7321,7 @@
       </p:sp>
       <p:pic>
         <p:nvPicPr>
-          <p:cNvPr id="8" name="Picture 7" descr="8985887862467248455.jpg"/>
+          <p:cNvPr id="8" name="Picture 7" descr="170834354795683952.jpg"/>
           <p:cNvPicPr>
             <a:picLocks noChangeAspect="1"/>
           </p:cNvPicPr>
@@ -7543,7 +7567,7 @@
       </p:sp>
       <p:pic>
         <p:nvPicPr>
-          <p:cNvPr id="4" name="Picture 3" descr="2576760445911522804.jpg"/>
+          <p:cNvPr id="4" name="Picture 3" descr="656621875290166694.jpg"/>
           <p:cNvPicPr>
             <a:picLocks noChangeAspect="1"/>
           </p:cNvPicPr>
@@ -7617,7 +7641,7 @@
       </p:sp>
       <p:pic>
         <p:nvPicPr>
-          <p:cNvPr id="6" name="Picture 5" descr="5796296351949293045.jpg"/>
+          <p:cNvPr id="6" name="Picture 5" descr="7566198043987178233.jpg"/>
           <p:cNvPicPr>
             <a:picLocks noChangeAspect="1"/>
           </p:cNvPicPr>
@@ -7902,7 +7926,7 @@
       </p:sp>
       <p:pic>
         <p:nvPicPr>
-          <p:cNvPr id="4" name="Picture 3" descr="7569565634467311940.jpg"/>
+          <p:cNvPr id="4" name="Picture 3" descr="3265271551630759646.jpg"/>
           <p:cNvPicPr>
             <a:picLocks noChangeAspect="1"/>
           </p:cNvPicPr>
@@ -7976,7 +8000,7 @@
       </p:sp>
       <p:pic>
         <p:nvPicPr>
-          <p:cNvPr id="6" name="Picture 5" descr="2243472078506660866.jpg"/>
+          <p:cNvPr id="6" name="Picture 5" descr="8158864131341198673.jpg"/>
           <p:cNvPicPr>
             <a:picLocks noChangeAspect="1"/>
           </p:cNvPicPr>
@@ -8050,7 +8074,7 @@
       </p:sp>
       <p:pic>
         <p:nvPicPr>
-          <p:cNvPr id="8" name="Picture 7" descr="4989919598133606109.jpg"/>
+          <p:cNvPr id="8" name="Picture 7" descr="6608562876406604035.jpg"/>
           <p:cNvPicPr>
             <a:picLocks noChangeAspect="1"/>
           </p:cNvPicPr>

--- a/templates/posts/october/01-10-2026-thu-ig-soil-regenerators-boubacar-panorama.pptx
+++ b/templates/posts/october/01-10-2026-thu-ig-soil-regenerators-boubacar-panorama.pptx
@@ -4294,7 +4294,7 @@
       </p:sp>
       <p:pic>
         <p:nvPicPr>
-          <p:cNvPr id="4" name="Picture 3" descr="4109970979879242798.jpg"/>
+          <p:cNvPr id="4" name="Picture 3" descr="6123901215584157425.jpg"/>
           <p:cNvPicPr>
             <a:picLocks noChangeAspect="1"/>
           </p:cNvPicPr>
@@ -4493,7 +4493,7 @@
             <a:r>
               <a:rPr sz="4200" b="1" i="0">
                 <a:solidFill>
-                  <a:srgbClr val="1E1412"/>
+                  <a:srgbClr val="111111"/>
                 </a:solidFill>
                 <a:latin typeface="Montserrat"/>
               </a:rPr>
@@ -4532,7 +4532,7 @@
             <a:r>
               <a:rPr sz="3800" b="0" i="0">
                 <a:solidFill>
-                  <a:srgbClr val="1E1412"/>
+                  <a:srgbClr val="111111"/>
                 </a:solidFill>
                 <a:latin typeface="Source Sans 3"/>
               </a:rPr>
@@ -4548,7 +4548,7 @@
             <a:r>
               <a:rPr sz="3800" b="0" i="0">
                 <a:solidFill>
-                  <a:srgbClr val="1E1412"/>
+                  <a:srgbClr val="111111"/>
                 </a:solidFill>
                 <a:latin typeface="Source Sans 3"/>
               </a:rPr>
@@ -4651,7 +4651,7 @@
       </p:sp>
       <p:pic>
         <p:nvPicPr>
-          <p:cNvPr id="4" name="Picture 3" descr="5001811493132577753.jpg"/>
+          <p:cNvPr id="4" name="Picture 3" descr="573570120097793725.jpg"/>
           <p:cNvPicPr>
             <a:picLocks noChangeAspect="1"/>
           </p:cNvPicPr>
@@ -4725,7 +4725,7 @@
       </p:sp>
       <p:pic>
         <p:nvPicPr>
-          <p:cNvPr id="6" name="Picture 5" descr="3981282921135775951.jpg"/>
+          <p:cNvPr id="6" name="Picture 5" descr="4670470938516362562.jpg"/>
           <p:cNvPicPr>
             <a:picLocks noChangeAspect="1"/>
           </p:cNvPicPr>
@@ -4829,7 +4829,7 @@
             <a:r>
               <a:rPr sz="4000" b="0" i="1">
                 <a:solidFill>
-                  <a:srgbClr val="1E1412"/>
+                  <a:srgbClr val="111111"/>
                 </a:solidFill>
                 <a:latin typeface="EB Garamond"/>
               </a:rPr>
@@ -4971,7 +4971,7 @@
       </p:sp>
       <p:pic>
         <p:nvPicPr>
-          <p:cNvPr id="4" name="Picture 3" descr="1765150814990569495.jpg"/>
+          <p:cNvPr id="4" name="Picture 3" descr="1480143517200043431.jpg"/>
           <p:cNvPicPr>
             <a:picLocks noChangeAspect="1"/>
           </p:cNvPicPr>
@@ -5138,7 +5138,7 @@
             <a:r>
               <a:rPr sz="4200" b="0" i="1">
                 <a:solidFill>
-                  <a:srgbClr val="22371F"/>
+                  <a:srgbClr val="111111"/>
                 </a:solidFill>
                 <a:latin typeface="EB Garamond"/>
               </a:rPr>
@@ -5280,7 +5280,7 @@
       </p:sp>
       <p:pic>
         <p:nvPicPr>
-          <p:cNvPr id="4" name="Picture 3" descr="8142344001491773862.jpg"/>
+          <p:cNvPr id="4" name="Picture 3" descr="6708487690624086840.jpg"/>
           <p:cNvPicPr>
             <a:picLocks noChangeAspect="1"/>
           </p:cNvPicPr>
@@ -5354,7 +5354,7 @@
       </p:sp>
       <p:pic>
         <p:nvPicPr>
-          <p:cNvPr id="6" name="Picture 5" descr="4095069121903239095.jpg"/>
+          <p:cNvPr id="6" name="Picture 5" descr="303756610304739359.jpg"/>
           <p:cNvPicPr>
             <a:picLocks noChangeAspect="1"/>
           </p:cNvPicPr>
@@ -5428,7 +5428,7 @@
       </p:sp>
       <p:pic>
         <p:nvPicPr>
-          <p:cNvPr id="8" name="Picture 7" descr="5209725869530073473.jpg"/>
+          <p:cNvPr id="8" name="Picture 7" descr="4400860986857173910.jpg"/>
           <p:cNvPicPr>
             <a:picLocks noChangeAspect="1"/>
           </p:cNvPicPr>
@@ -5532,7 +5532,7 @@
             <a:r>
               <a:rPr sz="3400" b="1" i="0">
                 <a:solidFill>
-                  <a:srgbClr val="22371F"/>
+                  <a:srgbClr val="111111"/>
                 </a:solidFill>
                 <a:latin typeface="Montserrat"/>
               </a:rPr>
@@ -5571,7 +5571,7 @@
             <a:r>
               <a:rPr sz="3000" b="0" i="0">
                 <a:solidFill>
-                  <a:srgbClr val="22371F"/>
+                  <a:srgbClr val="111111"/>
                 </a:solidFill>
                 <a:latin typeface="Source Sans 3"/>
               </a:rPr>
@@ -5713,7 +5713,7 @@
       </p:sp>
       <p:pic>
         <p:nvPicPr>
-          <p:cNvPr id="4" name="Picture 3" descr="6262579434734107698.jpg"/>
+          <p:cNvPr id="4" name="Picture 3" descr="7254724270291145421.jpg"/>
           <p:cNvPicPr>
             <a:picLocks noChangeAspect="1"/>
           </p:cNvPicPr>
@@ -5880,7 +5880,7 @@
             <a:r>
               <a:rPr sz="4200" b="1" i="0">
                 <a:solidFill>
-                  <a:srgbClr val="3A2524"/>
+                  <a:srgbClr val="111111"/>
                 </a:solidFill>
                 <a:latin typeface="Montserrat"/>
               </a:rPr>
@@ -5919,7 +5919,7 @@
             <a:r>
               <a:rPr sz="3800" b="0" i="1">
                 <a:solidFill>
-                  <a:srgbClr val="3A2524"/>
+                  <a:srgbClr val="111111"/>
                 </a:solidFill>
                 <a:latin typeface="EB Garamond"/>
               </a:rPr>
@@ -6061,7 +6061,7 @@
       </p:sp>
       <p:pic>
         <p:nvPicPr>
-          <p:cNvPr id="4" name="Picture 3" descr="989601373573727200.jpg"/>
+          <p:cNvPr id="4" name="Picture 3" descr="4129691697834149599.jpg"/>
           <p:cNvPicPr>
             <a:picLocks noChangeAspect="1"/>
           </p:cNvPicPr>
@@ -6135,7 +6135,7 @@
       </p:sp>
       <p:pic>
         <p:nvPicPr>
-          <p:cNvPr id="6" name="Picture 5" descr="3828878438671017906.jpg"/>
+          <p:cNvPr id="6" name="Picture 5" descr="8144716008250793994.jpg"/>
           <p:cNvPicPr>
             <a:picLocks noChangeAspect="1"/>
           </p:cNvPicPr>
@@ -6239,7 +6239,7 @@
             <a:r>
               <a:rPr sz="3600" b="1" i="0">
                 <a:solidFill>
-                  <a:srgbClr val="1E1412"/>
+                  <a:srgbClr val="111111"/>
                 </a:solidFill>
                 <a:latin typeface="Montserrat"/>
               </a:rPr>
@@ -6278,7 +6278,7 @@
             <a:r>
               <a:rPr sz="3200" b="0" i="0">
                 <a:solidFill>
-                  <a:srgbClr val="1E1412"/>
+                  <a:srgbClr val="111111"/>
                 </a:solidFill>
                 <a:latin typeface="Source Sans 3"/>
               </a:rPr>
@@ -6420,7 +6420,7 @@
       </p:sp>
       <p:pic>
         <p:nvPicPr>
-          <p:cNvPr id="4" name="Picture 3" descr="2954773160852668268.jpg"/>
+          <p:cNvPr id="4" name="Picture 3" descr="8847117874502812511.jpg"/>
           <p:cNvPicPr>
             <a:picLocks noChangeAspect="1"/>
           </p:cNvPicPr>
@@ -6494,7 +6494,7 @@
       </p:sp>
       <p:pic>
         <p:nvPicPr>
-          <p:cNvPr id="6" name="Picture 5" descr="7785404507869214963.jpg"/>
+          <p:cNvPr id="6" name="Picture 5" descr="3435385427485791029.jpg"/>
           <p:cNvPicPr>
             <a:picLocks noChangeAspect="1"/>
           </p:cNvPicPr>
@@ -6568,7 +6568,7 @@
       </p:sp>
       <p:pic>
         <p:nvPicPr>
-          <p:cNvPr id="8" name="Picture 7" descr="5337330571368428975.jpg"/>
+          <p:cNvPr id="8" name="Picture 7" descr="8232038402106676044.jpg"/>
           <p:cNvPicPr>
             <a:picLocks noChangeAspect="1"/>
           </p:cNvPicPr>
@@ -6672,7 +6672,7 @@
             <a:r>
               <a:rPr sz="5000" b="0" i="1">
                 <a:solidFill>
-                  <a:srgbClr val="22371F"/>
+                  <a:srgbClr val="111111"/>
                 </a:solidFill>
                 <a:latin typeface="EB Garamond"/>
               </a:rPr>
@@ -6814,7 +6814,7 @@
       </p:sp>
       <p:pic>
         <p:nvPicPr>
-          <p:cNvPr id="4" name="Picture 3" descr="8572501075660517052.jpg"/>
+          <p:cNvPr id="4" name="Picture 3" descr="3827803630240967957.jpg"/>
           <p:cNvPicPr>
             <a:picLocks noChangeAspect="1"/>
           </p:cNvPicPr>
@@ -6888,7 +6888,7 @@
       </p:sp>
       <p:pic>
         <p:nvPicPr>
-          <p:cNvPr id="6" name="Picture 5" descr="6801969508129382990.jpg"/>
+          <p:cNvPr id="6" name="Picture 5" descr="6156008357006694786.jpg"/>
           <p:cNvPicPr>
             <a:picLocks noChangeAspect="1"/>
           </p:cNvPicPr>
@@ -6992,7 +6992,7 @@
             <a:r>
               <a:rPr sz="4600" b="1" i="0">
                 <a:solidFill>
-                  <a:srgbClr val="3A2524"/>
+                  <a:srgbClr val="111111"/>
                 </a:solidFill>
                 <a:latin typeface="Montserrat"/>
               </a:rPr>
@@ -7031,7 +7031,7 @@
             <a:r>
               <a:rPr sz="4200" b="0" i="0">
                 <a:solidFill>
-                  <a:srgbClr val="3A2524"/>
+                  <a:srgbClr val="111111"/>
                 </a:solidFill>
                 <a:latin typeface="Source Sans 3"/>
               </a:rPr>
@@ -7173,7 +7173,7 @@
       </p:sp>
       <p:pic>
         <p:nvPicPr>
-          <p:cNvPr id="4" name="Picture 3" descr="2048157300180630448.jpg"/>
+          <p:cNvPr id="4" name="Picture 3" descr="5351916480321006429.jpg"/>
           <p:cNvPicPr>
             <a:picLocks noChangeAspect="1"/>
           </p:cNvPicPr>
@@ -7247,7 +7247,7 @@
       </p:sp>
       <p:pic>
         <p:nvPicPr>
-          <p:cNvPr id="6" name="Picture 5" descr="1446839296383176992.jpg"/>
+          <p:cNvPr id="6" name="Picture 5" descr="7390533119287967308.jpg"/>
           <p:cNvPicPr>
             <a:picLocks noChangeAspect="1"/>
           </p:cNvPicPr>
@@ -7321,7 +7321,7 @@
       </p:sp>
       <p:pic>
         <p:nvPicPr>
-          <p:cNvPr id="8" name="Picture 7" descr="170834354795683952.jpg"/>
+          <p:cNvPr id="8" name="Picture 7" descr="413117323359734423.jpg"/>
           <p:cNvPicPr>
             <a:picLocks noChangeAspect="1"/>
           </p:cNvPicPr>
@@ -7425,7 +7425,7 @@
             <a:r>
               <a:rPr sz="4000" b="0" i="1">
                 <a:solidFill>
-                  <a:srgbClr val="1E1412"/>
+                  <a:srgbClr val="111111"/>
                 </a:solidFill>
                 <a:latin typeface="EB Garamond"/>
               </a:rPr>
@@ -7567,7 +7567,7 @@
       </p:sp>
       <p:pic>
         <p:nvPicPr>
-          <p:cNvPr id="4" name="Picture 3" descr="656621875290166694.jpg"/>
+          <p:cNvPr id="4" name="Picture 3" descr="639056398582348918.jpg"/>
           <p:cNvPicPr>
             <a:picLocks noChangeAspect="1"/>
           </p:cNvPicPr>
@@ -7641,7 +7641,7 @@
       </p:sp>
       <p:pic>
         <p:nvPicPr>
-          <p:cNvPr id="6" name="Picture 5" descr="7566198043987178233.jpg"/>
+          <p:cNvPr id="6" name="Picture 5" descr="3242951787064084625.jpg"/>
           <p:cNvPicPr>
             <a:picLocks noChangeAspect="1"/>
           </p:cNvPicPr>
@@ -7745,7 +7745,7 @@
             <a:r>
               <a:rPr sz="4200" b="1" i="0">
                 <a:solidFill>
-                  <a:srgbClr val="22371F"/>
+                  <a:srgbClr val="111111"/>
                 </a:solidFill>
                 <a:latin typeface="Montserrat"/>
               </a:rPr>
@@ -7784,7 +7784,7 @@
             <a:r>
               <a:rPr sz="3800" b="0" i="0">
                 <a:solidFill>
-                  <a:srgbClr val="22371F"/>
+                  <a:srgbClr val="111111"/>
                 </a:solidFill>
                 <a:latin typeface="Source Sans 3"/>
               </a:rPr>
@@ -7926,7 +7926,7 @@
       </p:sp>
       <p:pic>
         <p:nvPicPr>
-          <p:cNvPr id="4" name="Picture 3" descr="3265271551630759646.jpg"/>
+          <p:cNvPr id="4" name="Picture 3" descr="4874417542843149092.jpg"/>
           <p:cNvPicPr>
             <a:picLocks noChangeAspect="1"/>
           </p:cNvPicPr>
@@ -8000,7 +8000,7 @@
       </p:sp>
       <p:pic>
         <p:nvPicPr>
-          <p:cNvPr id="6" name="Picture 5" descr="8158864131341198673.jpg"/>
+          <p:cNvPr id="6" name="Picture 5" descr="5830948452614957986.jpg"/>
           <p:cNvPicPr>
             <a:picLocks noChangeAspect="1"/>
           </p:cNvPicPr>
@@ -8074,7 +8074,7 @@
       </p:sp>
       <p:pic>
         <p:nvPicPr>
-          <p:cNvPr id="8" name="Picture 7" descr="6608562876406604035.jpg"/>
+          <p:cNvPr id="8" name="Picture 7" descr="3563066259113719631.jpg"/>
           <p:cNvPicPr>
             <a:picLocks noChangeAspect="1"/>
           </p:cNvPicPr>
@@ -8178,7 +8178,7 @@
             <a:r>
               <a:rPr sz="4200" b="0" i="1">
                 <a:solidFill>
-                  <a:srgbClr val="3A2524"/>
+                  <a:srgbClr val="111111"/>
                 </a:solidFill>
                 <a:latin typeface="EB Garamond"/>
               </a:rPr>

--- a/templates/posts/october/01-10-2026-thu-ig-soil-regenerators-boubacar-panorama.pptx
+++ b/templates/posts/october/01-10-2026-thu-ig-soil-regenerators-boubacar-panorama.pptx
@@ -4294,7 +4294,7 @@
       </p:sp>
       <p:pic>
         <p:nvPicPr>
-          <p:cNvPr id="4" name="Picture 3" descr="6123901215584157425.jpg"/>
+          <p:cNvPr id="4" name="Picture 3" descr="3611305251078463001.jpg"/>
           <p:cNvPicPr>
             <a:picLocks noChangeAspect="1"/>
           </p:cNvPicPr>
@@ -4651,7 +4651,7 @@
       </p:sp>
       <p:pic>
         <p:nvPicPr>
-          <p:cNvPr id="4" name="Picture 3" descr="573570120097793725.jpg"/>
+          <p:cNvPr id="4" name="Picture 3" descr="923507240374489619.jpg"/>
           <p:cNvPicPr>
             <a:picLocks noChangeAspect="1"/>
           </p:cNvPicPr>
@@ -4725,7 +4725,7 @@
       </p:sp>
       <p:pic>
         <p:nvPicPr>
-          <p:cNvPr id="6" name="Picture 5" descr="4670470938516362562.jpg"/>
+          <p:cNvPr id="6" name="Picture 5" descr="9048637673808534685.jpg"/>
           <p:cNvPicPr>
             <a:picLocks noChangeAspect="1"/>
           </p:cNvPicPr>
@@ -4971,7 +4971,7 @@
       </p:sp>
       <p:pic>
         <p:nvPicPr>
-          <p:cNvPr id="4" name="Picture 3" descr="1480143517200043431.jpg"/>
+          <p:cNvPr id="4" name="Picture 3" descr="7103052804039915904.jpg"/>
           <p:cNvPicPr>
             <a:picLocks noChangeAspect="1"/>
           </p:cNvPicPr>
@@ -5280,7 +5280,7 @@
       </p:sp>
       <p:pic>
         <p:nvPicPr>
-          <p:cNvPr id="4" name="Picture 3" descr="6708487690624086840.jpg"/>
+          <p:cNvPr id="4" name="Picture 3" descr="2337138565757055028.jpg"/>
           <p:cNvPicPr>
             <a:picLocks noChangeAspect="1"/>
           </p:cNvPicPr>
@@ -5354,7 +5354,7 @@
       </p:sp>
       <p:pic>
         <p:nvPicPr>
-          <p:cNvPr id="6" name="Picture 5" descr="303756610304739359.jpg"/>
+          <p:cNvPr id="6" name="Picture 5" descr="7301365759664374841.jpg"/>
           <p:cNvPicPr>
             <a:picLocks noChangeAspect="1"/>
           </p:cNvPicPr>
@@ -5428,7 +5428,7 @@
       </p:sp>
       <p:pic>
         <p:nvPicPr>
-          <p:cNvPr id="8" name="Picture 7" descr="4400860986857173910.jpg"/>
+          <p:cNvPr id="8" name="Picture 7" descr="4842397589871022002.jpg"/>
           <p:cNvPicPr>
             <a:picLocks noChangeAspect="1"/>
           </p:cNvPicPr>
@@ -5713,7 +5713,7 @@
       </p:sp>
       <p:pic>
         <p:nvPicPr>
-          <p:cNvPr id="4" name="Picture 3" descr="7254724270291145421.jpg"/>
+          <p:cNvPr id="4" name="Picture 3" descr="7443357138971394038.jpg"/>
           <p:cNvPicPr>
             <a:picLocks noChangeAspect="1"/>
           </p:cNvPicPr>
@@ -6061,7 +6061,7 @@
       </p:sp>
       <p:pic>
         <p:nvPicPr>
-          <p:cNvPr id="4" name="Picture 3" descr="4129691697834149599.jpg"/>
+          <p:cNvPr id="4" name="Picture 3" descr="2640628226144488551.jpg"/>
           <p:cNvPicPr>
             <a:picLocks noChangeAspect="1"/>
           </p:cNvPicPr>
@@ -6135,7 +6135,7 @@
       </p:sp>
       <p:pic>
         <p:nvPicPr>
-          <p:cNvPr id="6" name="Picture 5" descr="8144716008250793994.jpg"/>
+          <p:cNvPr id="6" name="Picture 5" descr="8943500059862766576.jpg"/>
           <p:cNvPicPr>
             <a:picLocks noChangeAspect="1"/>
           </p:cNvPicPr>
@@ -6420,7 +6420,7 @@
       </p:sp>
       <p:pic>
         <p:nvPicPr>
-          <p:cNvPr id="4" name="Picture 3" descr="8847117874502812511.jpg"/>
+          <p:cNvPr id="4" name="Picture 3" descr="88623764313377648.jpg"/>
           <p:cNvPicPr>
             <a:picLocks noChangeAspect="1"/>
           </p:cNvPicPr>
@@ -6494,7 +6494,7 @@
       </p:sp>
       <p:pic>
         <p:nvPicPr>
-          <p:cNvPr id="6" name="Picture 5" descr="3435385427485791029.jpg"/>
+          <p:cNvPr id="6" name="Picture 5" descr="2870694808335635487.jpg"/>
           <p:cNvPicPr>
             <a:picLocks noChangeAspect="1"/>
           </p:cNvPicPr>
@@ -6568,7 +6568,7 @@
       </p:sp>
       <p:pic>
         <p:nvPicPr>
-          <p:cNvPr id="8" name="Picture 7" descr="8232038402106676044.jpg"/>
+          <p:cNvPr id="8" name="Picture 7" descr="4830071798219216154.jpg"/>
           <p:cNvPicPr>
             <a:picLocks noChangeAspect="1"/>
           </p:cNvPicPr>
@@ -6814,7 +6814,7 @@
       </p:sp>
       <p:pic>
         <p:nvPicPr>
-          <p:cNvPr id="4" name="Picture 3" descr="3827803630240967957.jpg"/>
+          <p:cNvPr id="4" name="Picture 3" descr="6937741189132996708.jpg"/>
           <p:cNvPicPr>
             <a:picLocks noChangeAspect="1"/>
           </p:cNvPicPr>
@@ -6888,7 +6888,7 @@
       </p:sp>
       <p:pic>
         <p:nvPicPr>
-          <p:cNvPr id="6" name="Picture 5" descr="6156008357006694786.jpg"/>
+          <p:cNvPr id="6" name="Picture 5" descr="6614745515716195778.jpg"/>
           <p:cNvPicPr>
             <a:picLocks noChangeAspect="1"/>
           </p:cNvPicPr>
@@ -7173,7 +7173,7 @@
       </p:sp>
       <p:pic>
         <p:nvPicPr>
-          <p:cNvPr id="4" name="Picture 3" descr="5351916480321006429.jpg"/>
+          <p:cNvPr id="4" name="Picture 3" descr="6059067888895976345.jpg"/>
           <p:cNvPicPr>
             <a:picLocks noChangeAspect="1"/>
           </p:cNvPicPr>
@@ -7247,7 +7247,7 @@
       </p:sp>
       <p:pic>
         <p:nvPicPr>
-          <p:cNvPr id="6" name="Picture 5" descr="7390533119287967308.jpg"/>
+          <p:cNvPr id="6" name="Picture 5" descr="7479735688013804504.jpg"/>
           <p:cNvPicPr>
             <a:picLocks noChangeAspect="1"/>
           </p:cNvPicPr>
@@ -7321,7 +7321,7 @@
       </p:sp>
       <p:pic>
         <p:nvPicPr>
-          <p:cNvPr id="8" name="Picture 7" descr="413117323359734423.jpg"/>
+          <p:cNvPr id="8" name="Picture 7" descr="1634056141955195587.jpg"/>
           <p:cNvPicPr>
             <a:picLocks noChangeAspect="1"/>
           </p:cNvPicPr>
@@ -7567,7 +7567,7 @@
       </p:sp>
       <p:pic>
         <p:nvPicPr>
-          <p:cNvPr id="4" name="Picture 3" descr="639056398582348918.jpg"/>
+          <p:cNvPr id="4" name="Picture 3" descr="7799867926203698170.jpg"/>
           <p:cNvPicPr>
             <a:picLocks noChangeAspect="1"/>
           </p:cNvPicPr>
@@ -7641,7 +7641,7 @@
       </p:sp>
       <p:pic>
         <p:nvPicPr>
-          <p:cNvPr id="6" name="Picture 5" descr="3242951787064084625.jpg"/>
+          <p:cNvPr id="6" name="Picture 5" descr="1826450317542429168.jpg"/>
           <p:cNvPicPr>
             <a:picLocks noChangeAspect="1"/>
           </p:cNvPicPr>
@@ -7926,7 +7926,7 @@
       </p:sp>
       <p:pic>
         <p:nvPicPr>
-          <p:cNvPr id="4" name="Picture 3" descr="4874417542843149092.jpg"/>
+          <p:cNvPr id="4" name="Picture 3" descr="1298633622564475010.jpg"/>
           <p:cNvPicPr>
             <a:picLocks noChangeAspect="1"/>
           </p:cNvPicPr>
@@ -8000,7 +8000,7 @@
       </p:sp>
       <p:pic>
         <p:nvPicPr>
-          <p:cNvPr id="6" name="Picture 5" descr="5830948452614957986.jpg"/>
+          <p:cNvPr id="6" name="Picture 5" descr="3724097393132003757.jpg"/>
           <p:cNvPicPr>
             <a:picLocks noChangeAspect="1"/>
           </p:cNvPicPr>
@@ -8074,7 +8074,7 @@
       </p:sp>
       <p:pic>
         <p:nvPicPr>
-          <p:cNvPr id="8" name="Picture 7" descr="3563066259113719631.jpg"/>
+          <p:cNvPr id="8" name="Picture 7" descr="3545831359203224022.jpg"/>
           <p:cNvPicPr>
             <a:picLocks noChangeAspect="1"/>
           </p:cNvPicPr>

--- a/templates/posts/october/01-10-2026-thu-ig-soil-regenerators-boubacar-panorama.pptx
+++ b/templates/posts/october/01-10-2026-thu-ig-soil-regenerators-boubacar-panorama.pptx
@@ -4294,7 +4294,7 @@
       </p:sp>
       <p:pic>
         <p:nvPicPr>
-          <p:cNvPr id="4" name="Picture 3" descr="3611305251078463001.jpg"/>
+          <p:cNvPr id="4" name="Picture 3" descr="1255321397118503662.jpg"/>
           <p:cNvPicPr>
             <a:picLocks noChangeAspect="1"/>
           </p:cNvPicPr>
@@ -4651,7 +4651,7 @@
       </p:sp>
       <p:pic>
         <p:nvPicPr>
-          <p:cNvPr id="4" name="Picture 3" descr="923507240374489619.jpg"/>
+          <p:cNvPr id="4" name="Picture 3" descr="6200395086801802323.jpg"/>
           <p:cNvPicPr>
             <a:picLocks noChangeAspect="1"/>
           </p:cNvPicPr>
@@ -4725,7 +4725,7 @@
       </p:sp>
       <p:pic>
         <p:nvPicPr>
-          <p:cNvPr id="6" name="Picture 5" descr="9048637673808534685.jpg"/>
+          <p:cNvPr id="6" name="Picture 5" descr="1532915340839606499.jpg"/>
           <p:cNvPicPr>
             <a:picLocks noChangeAspect="1"/>
           </p:cNvPicPr>
@@ -4971,7 +4971,7 @@
       </p:sp>
       <p:pic>
         <p:nvPicPr>
-          <p:cNvPr id="4" name="Picture 3" descr="7103052804039915904.jpg"/>
+          <p:cNvPr id="4" name="Picture 3" descr="2110845207361499056.jpg"/>
           <p:cNvPicPr>
             <a:picLocks noChangeAspect="1"/>
           </p:cNvPicPr>
@@ -5280,7 +5280,7 @@
       </p:sp>
       <p:pic>
         <p:nvPicPr>
-          <p:cNvPr id="4" name="Picture 3" descr="2337138565757055028.jpg"/>
+          <p:cNvPr id="4" name="Picture 3" descr="2671777484398708714.jpg"/>
           <p:cNvPicPr>
             <a:picLocks noChangeAspect="1"/>
           </p:cNvPicPr>
@@ -5354,7 +5354,7 @@
       </p:sp>
       <p:pic>
         <p:nvPicPr>
-          <p:cNvPr id="6" name="Picture 5" descr="7301365759664374841.jpg"/>
+          <p:cNvPr id="6" name="Picture 5" descr="1885816854920749168.jpg"/>
           <p:cNvPicPr>
             <a:picLocks noChangeAspect="1"/>
           </p:cNvPicPr>
@@ -5428,7 +5428,7 @@
       </p:sp>
       <p:pic>
         <p:nvPicPr>
-          <p:cNvPr id="8" name="Picture 7" descr="4842397589871022002.jpg"/>
+          <p:cNvPr id="8" name="Picture 7" descr="8654226429435830402.jpg"/>
           <p:cNvPicPr>
             <a:picLocks noChangeAspect="1"/>
           </p:cNvPicPr>
@@ -5713,7 +5713,7 @@
       </p:sp>
       <p:pic>
         <p:nvPicPr>
-          <p:cNvPr id="4" name="Picture 3" descr="7443357138971394038.jpg"/>
+          <p:cNvPr id="4" name="Picture 3" descr="7130806041857244525.jpg"/>
           <p:cNvPicPr>
             <a:picLocks noChangeAspect="1"/>
           </p:cNvPicPr>
@@ -6061,7 +6061,7 @@
       </p:sp>
       <p:pic>
         <p:nvPicPr>
-          <p:cNvPr id="4" name="Picture 3" descr="2640628226144488551.jpg"/>
+          <p:cNvPr id="4" name="Picture 3" descr="4251733815056260940.jpg"/>
           <p:cNvPicPr>
             <a:picLocks noChangeAspect="1"/>
           </p:cNvPicPr>
@@ -6135,7 +6135,7 @@
       </p:sp>
       <p:pic>
         <p:nvPicPr>
-          <p:cNvPr id="6" name="Picture 5" descr="8943500059862766576.jpg"/>
+          <p:cNvPr id="6" name="Picture 5" descr="497196630915811958.jpg"/>
           <p:cNvPicPr>
             <a:picLocks noChangeAspect="1"/>
           </p:cNvPicPr>
@@ -6420,7 +6420,7 @@
       </p:sp>
       <p:pic>
         <p:nvPicPr>
-          <p:cNvPr id="4" name="Picture 3" descr="88623764313377648.jpg"/>
+          <p:cNvPr id="4" name="Picture 3" descr="5371595178036235813.jpg"/>
           <p:cNvPicPr>
             <a:picLocks noChangeAspect="1"/>
           </p:cNvPicPr>
@@ -6494,7 +6494,7 @@
       </p:sp>
       <p:pic>
         <p:nvPicPr>
-          <p:cNvPr id="6" name="Picture 5" descr="2870694808335635487.jpg"/>
+          <p:cNvPr id="6" name="Picture 5" descr="7811348330936755836.jpg"/>
           <p:cNvPicPr>
             <a:picLocks noChangeAspect="1"/>
           </p:cNvPicPr>
@@ -6568,7 +6568,7 @@
       </p:sp>
       <p:pic>
         <p:nvPicPr>
-          <p:cNvPr id="8" name="Picture 7" descr="4830071798219216154.jpg"/>
+          <p:cNvPr id="8" name="Picture 7" descr="5730528523914964181.jpg"/>
           <p:cNvPicPr>
             <a:picLocks noChangeAspect="1"/>
           </p:cNvPicPr>
@@ -6814,7 +6814,7 @@
       </p:sp>
       <p:pic>
         <p:nvPicPr>
-          <p:cNvPr id="4" name="Picture 3" descr="6937741189132996708.jpg"/>
+          <p:cNvPr id="4" name="Picture 3" descr="824040993852720534.jpg"/>
           <p:cNvPicPr>
             <a:picLocks noChangeAspect="1"/>
           </p:cNvPicPr>
@@ -6888,7 +6888,7 @@
       </p:sp>
       <p:pic>
         <p:nvPicPr>
-          <p:cNvPr id="6" name="Picture 5" descr="6614745515716195778.jpg"/>
+          <p:cNvPr id="6" name="Picture 5" descr="4544265816777435803.jpg"/>
           <p:cNvPicPr>
             <a:picLocks noChangeAspect="1"/>
           </p:cNvPicPr>
@@ -7173,7 +7173,7 @@
       </p:sp>
       <p:pic>
         <p:nvPicPr>
-          <p:cNvPr id="4" name="Picture 3" descr="6059067888895976345.jpg"/>
+          <p:cNvPr id="4" name="Picture 3" descr="7038820089687773903.jpg"/>
           <p:cNvPicPr>
             <a:picLocks noChangeAspect="1"/>
           </p:cNvPicPr>
@@ -7247,7 +7247,7 @@
       </p:sp>
       <p:pic>
         <p:nvPicPr>
-          <p:cNvPr id="6" name="Picture 5" descr="7479735688013804504.jpg"/>
+          <p:cNvPr id="6" name="Picture 5" descr="7848408706760798123.jpg"/>
           <p:cNvPicPr>
             <a:picLocks noChangeAspect="1"/>
           </p:cNvPicPr>
@@ -7321,7 +7321,7 @@
       </p:sp>
       <p:pic>
         <p:nvPicPr>
-          <p:cNvPr id="8" name="Picture 7" descr="1634056141955195587.jpg"/>
+          <p:cNvPr id="8" name="Picture 7" descr="8110692587519583985.jpg"/>
           <p:cNvPicPr>
             <a:picLocks noChangeAspect="1"/>
           </p:cNvPicPr>
@@ -7567,7 +7567,7 @@
       </p:sp>
       <p:pic>
         <p:nvPicPr>
-          <p:cNvPr id="4" name="Picture 3" descr="7799867926203698170.jpg"/>
+          <p:cNvPr id="4" name="Picture 3" descr="4733234755688133636.jpg"/>
           <p:cNvPicPr>
             <a:picLocks noChangeAspect="1"/>
           </p:cNvPicPr>
@@ -7641,7 +7641,7 @@
       </p:sp>
       <p:pic>
         <p:nvPicPr>
-          <p:cNvPr id="6" name="Picture 5" descr="1826450317542429168.jpg"/>
+          <p:cNvPr id="6" name="Picture 5" descr="6425348048822301076.jpg"/>
           <p:cNvPicPr>
             <a:picLocks noChangeAspect="1"/>
           </p:cNvPicPr>
@@ -7926,7 +7926,7 @@
       </p:sp>
       <p:pic>
         <p:nvPicPr>
-          <p:cNvPr id="4" name="Picture 3" descr="1298633622564475010.jpg"/>
+          <p:cNvPr id="4" name="Picture 3" descr="1006630717731204762.jpg"/>
           <p:cNvPicPr>
             <a:picLocks noChangeAspect="1"/>
           </p:cNvPicPr>
@@ -8000,7 +8000,7 @@
       </p:sp>
       <p:pic>
         <p:nvPicPr>
-          <p:cNvPr id="6" name="Picture 5" descr="3724097393132003757.jpg"/>
+          <p:cNvPr id="6" name="Picture 5" descr="3130198700300268617.jpg"/>
           <p:cNvPicPr>
             <a:picLocks noChangeAspect="1"/>
           </p:cNvPicPr>
@@ -8074,7 +8074,7 @@
       </p:sp>
       <p:pic>
         <p:nvPicPr>
-          <p:cNvPr id="8" name="Picture 7" descr="3545831359203224022.jpg"/>
+          <p:cNvPr id="8" name="Picture 7" descr="1635339994574843370.jpg"/>
           <p:cNvPicPr>
             <a:picLocks noChangeAspect="1"/>
           </p:cNvPicPr>

--- a/templates/posts/october/01-10-2026-thu-ig-soil-regenerators-boubacar-panorama.pptx
+++ b/templates/posts/october/01-10-2026-thu-ig-soil-regenerators-boubacar-panorama.pptx
@@ -4294,7 +4294,7 @@
       </p:sp>
       <p:pic>
         <p:nvPicPr>
-          <p:cNvPr id="4" name="Picture 3" descr="1255321397118503662.jpg"/>
+          <p:cNvPr id="4" name="Picture 3" descr="9146703534493900474.jpg"/>
           <p:cNvPicPr>
             <a:picLocks noChangeAspect="1"/>
           </p:cNvPicPr>
@@ -4651,7 +4651,7 @@
       </p:sp>
       <p:pic>
         <p:nvPicPr>
-          <p:cNvPr id="4" name="Picture 3" descr="6200395086801802323.jpg"/>
+          <p:cNvPr id="4" name="Picture 3" descr="7557120030887073844.jpg"/>
           <p:cNvPicPr>
             <a:picLocks noChangeAspect="1"/>
           </p:cNvPicPr>
@@ -4725,7 +4725,7 @@
       </p:sp>
       <p:pic>
         <p:nvPicPr>
-          <p:cNvPr id="6" name="Picture 5" descr="1532915340839606499.jpg"/>
+          <p:cNvPr id="6" name="Picture 5" descr="2867181387995128763.jpg"/>
           <p:cNvPicPr>
             <a:picLocks noChangeAspect="1"/>
           </p:cNvPicPr>
@@ -4971,7 +4971,7 @@
       </p:sp>
       <p:pic>
         <p:nvPicPr>
-          <p:cNvPr id="4" name="Picture 3" descr="2110845207361499056.jpg"/>
+          <p:cNvPr id="4" name="Picture 3" descr="8495659903461057680.jpg"/>
           <p:cNvPicPr>
             <a:picLocks noChangeAspect="1"/>
           </p:cNvPicPr>
@@ -5280,7 +5280,7 @@
       </p:sp>
       <p:pic>
         <p:nvPicPr>
-          <p:cNvPr id="4" name="Picture 3" descr="2671777484398708714.jpg"/>
+          <p:cNvPr id="4" name="Picture 3" descr="5047621098704444496.jpg"/>
           <p:cNvPicPr>
             <a:picLocks noChangeAspect="1"/>
           </p:cNvPicPr>
@@ -5354,7 +5354,7 @@
       </p:sp>
       <p:pic>
         <p:nvPicPr>
-          <p:cNvPr id="6" name="Picture 5" descr="1885816854920749168.jpg"/>
+          <p:cNvPr id="6" name="Picture 5" descr="7359934136271464519.jpg"/>
           <p:cNvPicPr>
             <a:picLocks noChangeAspect="1"/>
           </p:cNvPicPr>
@@ -5428,7 +5428,7 @@
       </p:sp>
       <p:pic>
         <p:nvPicPr>
-          <p:cNvPr id="8" name="Picture 7" descr="8654226429435830402.jpg"/>
+          <p:cNvPr id="8" name="Picture 7" descr="2961298772235318280.jpg"/>
           <p:cNvPicPr>
             <a:picLocks noChangeAspect="1"/>
           </p:cNvPicPr>
@@ -5713,7 +5713,7 @@
       </p:sp>
       <p:pic>
         <p:nvPicPr>
-          <p:cNvPr id="4" name="Picture 3" descr="7130806041857244525.jpg"/>
+          <p:cNvPr id="4" name="Picture 3" descr="7512623680421889721.jpg"/>
           <p:cNvPicPr>
             <a:picLocks noChangeAspect="1"/>
           </p:cNvPicPr>
@@ -6061,7 +6061,7 @@
       </p:sp>
       <p:pic>
         <p:nvPicPr>
-          <p:cNvPr id="4" name="Picture 3" descr="4251733815056260940.jpg"/>
+          <p:cNvPr id="4" name="Picture 3" descr="6415376232431299465.jpg"/>
           <p:cNvPicPr>
             <a:picLocks noChangeAspect="1"/>
           </p:cNvPicPr>
@@ -6135,7 +6135,7 @@
       </p:sp>
       <p:pic>
         <p:nvPicPr>
-          <p:cNvPr id="6" name="Picture 5" descr="497196630915811958.jpg"/>
+          <p:cNvPr id="6" name="Picture 5" descr="4834556906757308061.jpg"/>
           <p:cNvPicPr>
             <a:picLocks noChangeAspect="1"/>
           </p:cNvPicPr>
@@ -6420,7 +6420,7 @@
       </p:sp>
       <p:pic>
         <p:nvPicPr>
-          <p:cNvPr id="4" name="Picture 3" descr="5371595178036235813.jpg"/>
+          <p:cNvPr id="4" name="Picture 3" descr="2047537879963561994.jpg"/>
           <p:cNvPicPr>
             <a:picLocks noChangeAspect="1"/>
           </p:cNvPicPr>
@@ -6494,7 +6494,7 @@
       </p:sp>
       <p:pic>
         <p:nvPicPr>
-          <p:cNvPr id="6" name="Picture 5" descr="7811348330936755836.jpg"/>
+          <p:cNvPr id="6" name="Picture 5" descr="1893886019550888933.jpg"/>
           <p:cNvPicPr>
             <a:picLocks noChangeAspect="1"/>
           </p:cNvPicPr>
@@ -6568,7 +6568,7 @@
       </p:sp>
       <p:pic>
         <p:nvPicPr>
-          <p:cNvPr id="8" name="Picture 7" descr="5730528523914964181.jpg"/>
+          <p:cNvPr id="8" name="Picture 7" descr="3072814875906645445.jpg"/>
           <p:cNvPicPr>
             <a:picLocks noChangeAspect="1"/>
           </p:cNvPicPr>
@@ -6814,7 +6814,7 @@
       </p:sp>
       <p:pic>
         <p:nvPicPr>
-          <p:cNvPr id="4" name="Picture 3" descr="824040993852720534.jpg"/>
+          <p:cNvPr id="4" name="Picture 3" descr="148576309075155839.jpg"/>
           <p:cNvPicPr>
             <a:picLocks noChangeAspect="1"/>
           </p:cNvPicPr>
@@ -6888,7 +6888,7 @@
       </p:sp>
       <p:pic>
         <p:nvPicPr>
-          <p:cNvPr id="6" name="Picture 5" descr="4544265816777435803.jpg"/>
+          <p:cNvPr id="6" name="Picture 5" descr="3994466678601637555.jpg"/>
           <p:cNvPicPr>
             <a:picLocks noChangeAspect="1"/>
           </p:cNvPicPr>
@@ -7173,7 +7173,7 @@
       </p:sp>
       <p:pic>
         <p:nvPicPr>
-          <p:cNvPr id="4" name="Picture 3" descr="7038820089687773903.jpg"/>
+          <p:cNvPr id="4" name="Picture 3" descr="3375338345793269160.jpg"/>
           <p:cNvPicPr>
             <a:picLocks noChangeAspect="1"/>
           </p:cNvPicPr>
@@ -7247,7 +7247,7 @@
       </p:sp>
       <p:pic>
         <p:nvPicPr>
-          <p:cNvPr id="6" name="Picture 5" descr="7848408706760798123.jpg"/>
+          <p:cNvPr id="6" name="Picture 5" descr="7509962629312591149.jpg"/>
           <p:cNvPicPr>
             <a:picLocks noChangeAspect="1"/>
           </p:cNvPicPr>
@@ -7321,7 +7321,7 @@
       </p:sp>
       <p:pic>
         <p:nvPicPr>
-          <p:cNvPr id="8" name="Picture 7" descr="8110692587519583985.jpg"/>
+          <p:cNvPr id="8" name="Picture 7" descr="495467069273280446.jpg"/>
           <p:cNvPicPr>
             <a:picLocks noChangeAspect="1"/>
           </p:cNvPicPr>
@@ -7567,7 +7567,7 @@
       </p:sp>
       <p:pic>
         <p:nvPicPr>
-          <p:cNvPr id="4" name="Picture 3" descr="4733234755688133636.jpg"/>
+          <p:cNvPr id="4" name="Picture 3" descr="4255732931753039996.jpg"/>
           <p:cNvPicPr>
             <a:picLocks noChangeAspect="1"/>
           </p:cNvPicPr>
@@ -7641,7 +7641,7 @@
       </p:sp>
       <p:pic>
         <p:nvPicPr>
-          <p:cNvPr id="6" name="Picture 5" descr="6425348048822301076.jpg"/>
+          <p:cNvPr id="6" name="Picture 5" descr="6792196242212733485.jpg"/>
           <p:cNvPicPr>
             <a:picLocks noChangeAspect="1"/>
           </p:cNvPicPr>
@@ -7926,7 +7926,7 @@
       </p:sp>
       <p:pic>
         <p:nvPicPr>
-          <p:cNvPr id="4" name="Picture 3" descr="1006630717731204762.jpg"/>
+          <p:cNvPr id="4" name="Picture 3" descr="3209269886753532911.jpg"/>
           <p:cNvPicPr>
             <a:picLocks noChangeAspect="1"/>
           </p:cNvPicPr>
@@ -8000,7 +8000,7 @@
       </p:sp>
       <p:pic>
         <p:nvPicPr>
-          <p:cNvPr id="6" name="Picture 5" descr="3130198700300268617.jpg"/>
+          <p:cNvPr id="6" name="Picture 5" descr="7766997704941731730.jpg"/>
           <p:cNvPicPr>
             <a:picLocks noChangeAspect="1"/>
           </p:cNvPicPr>
@@ -8074,7 +8074,7 @@
       </p:sp>
       <p:pic>
         <p:nvPicPr>
-          <p:cNvPr id="8" name="Picture 7" descr="1635339994574843370.jpg"/>
+          <p:cNvPr id="8" name="Picture 7" descr="4578081823342175431.jpg"/>
           <p:cNvPicPr>
             <a:picLocks noChangeAspect="1"/>
           </p:cNvPicPr>
